--- a/ゲーム科2年/00_前期/ゲーム開発Ⅲ/ゲーム物理学/座学/24_反射.pptx
+++ b/ゲーム科2年/00_前期/ゲーム開発Ⅲ/ゲーム物理学/座学/24_反射.pptx
@@ -18,6 +18,7 @@
     <p:sldId id="271" r:id="rId12"/>
     <p:sldId id="272" r:id="rId13"/>
     <p:sldId id="273" r:id="rId14"/>
+    <p:sldId id="274" r:id="rId15"/>
   </p:sldIdLst>
   <p:sldSz cx="12192000" cy="6858000"/>
   <p:notesSz cx="6858000" cy="9144000"/>
@@ -271,7 +272,7 @@
           <a:p>
             <a:fld id="{E9CC885B-4903-4D54-9A93-00025F12DED9}" type="datetimeFigureOut">
               <a:rPr kumimoji="1" lang="ja-JP" altLang="en-US" smtClean="0"/>
-              <a:t>2025/10/21</a:t>
+              <a:t>2025/10/28</a:t>
             </a:fld>
             <a:endParaRPr kumimoji="1" lang="ja-JP" altLang="en-US"/>
           </a:p>
@@ -501,7 +502,7 @@
           <a:p>
             <a:fld id="{E9CC885B-4903-4D54-9A93-00025F12DED9}" type="datetimeFigureOut">
               <a:rPr kumimoji="1" lang="ja-JP" altLang="en-US" smtClean="0"/>
-              <a:t>2025/10/21</a:t>
+              <a:t>2025/10/28</a:t>
             </a:fld>
             <a:endParaRPr kumimoji="1" lang="ja-JP" altLang="en-US"/>
           </a:p>
@@ -741,7 +742,7 @@
           <a:p>
             <a:fld id="{E9CC885B-4903-4D54-9A93-00025F12DED9}" type="datetimeFigureOut">
               <a:rPr kumimoji="1" lang="ja-JP" altLang="en-US" smtClean="0"/>
-              <a:t>2025/10/21</a:t>
+              <a:t>2025/10/28</a:t>
             </a:fld>
             <a:endParaRPr kumimoji="1" lang="ja-JP" altLang="en-US"/>
           </a:p>
@@ -971,7 +972,7 @@
           <a:p>
             <a:fld id="{E9CC885B-4903-4D54-9A93-00025F12DED9}" type="datetimeFigureOut">
               <a:rPr kumimoji="1" lang="ja-JP" altLang="en-US" smtClean="0"/>
-              <a:t>2025/10/21</a:t>
+              <a:t>2025/10/28</a:t>
             </a:fld>
             <a:endParaRPr kumimoji="1" lang="ja-JP" altLang="en-US"/>
           </a:p>
@@ -1246,7 +1247,7 @@
           <a:p>
             <a:fld id="{E9CC885B-4903-4D54-9A93-00025F12DED9}" type="datetimeFigureOut">
               <a:rPr kumimoji="1" lang="ja-JP" altLang="en-US" smtClean="0"/>
-              <a:t>2025/10/21</a:t>
+              <a:t>2025/10/28</a:t>
             </a:fld>
             <a:endParaRPr kumimoji="1" lang="ja-JP" altLang="en-US"/>
           </a:p>
@@ -1575,7 +1576,7 @@
           <a:p>
             <a:fld id="{E9CC885B-4903-4D54-9A93-00025F12DED9}" type="datetimeFigureOut">
               <a:rPr kumimoji="1" lang="ja-JP" altLang="en-US" smtClean="0"/>
-              <a:t>2025/10/21</a:t>
+              <a:t>2025/10/28</a:t>
             </a:fld>
             <a:endParaRPr kumimoji="1" lang="ja-JP" altLang="en-US"/>
           </a:p>
@@ -2051,7 +2052,7 @@
           <a:p>
             <a:fld id="{E9CC885B-4903-4D54-9A93-00025F12DED9}" type="datetimeFigureOut">
               <a:rPr kumimoji="1" lang="ja-JP" altLang="en-US" smtClean="0"/>
-              <a:t>2025/10/21</a:t>
+              <a:t>2025/10/28</a:t>
             </a:fld>
             <a:endParaRPr kumimoji="1" lang="ja-JP" altLang="en-US"/>
           </a:p>
@@ -2192,7 +2193,7 @@
           <a:p>
             <a:fld id="{E9CC885B-4903-4D54-9A93-00025F12DED9}" type="datetimeFigureOut">
               <a:rPr kumimoji="1" lang="ja-JP" altLang="en-US" smtClean="0"/>
-              <a:t>2025/10/21</a:t>
+              <a:t>2025/10/28</a:t>
             </a:fld>
             <a:endParaRPr kumimoji="1" lang="ja-JP" altLang="en-US"/>
           </a:p>
@@ -2305,7 +2306,7 @@
           <a:p>
             <a:fld id="{E9CC885B-4903-4D54-9A93-00025F12DED9}" type="datetimeFigureOut">
               <a:rPr kumimoji="1" lang="ja-JP" altLang="en-US" smtClean="0"/>
-              <a:t>2025/10/21</a:t>
+              <a:t>2025/10/28</a:t>
             </a:fld>
             <a:endParaRPr kumimoji="1" lang="ja-JP" altLang="en-US"/>
           </a:p>
@@ -2648,7 +2649,7 @@
           <a:p>
             <a:fld id="{E9CC885B-4903-4D54-9A93-00025F12DED9}" type="datetimeFigureOut">
               <a:rPr kumimoji="1" lang="ja-JP" altLang="en-US" smtClean="0"/>
-              <a:t>2025/10/21</a:t>
+              <a:t>2025/10/28</a:t>
             </a:fld>
             <a:endParaRPr kumimoji="1" lang="ja-JP" altLang="en-US"/>
           </a:p>
@@ -2936,7 +2937,7 @@
           <a:p>
             <a:fld id="{E9CC885B-4903-4D54-9A93-00025F12DED9}" type="datetimeFigureOut">
               <a:rPr kumimoji="1" lang="ja-JP" altLang="en-US" smtClean="0"/>
-              <a:t>2025/10/21</a:t>
+              <a:t>2025/10/28</a:t>
             </a:fld>
             <a:endParaRPr kumimoji="1" lang="ja-JP" altLang="en-US"/>
           </a:p>
@@ -3209,7 +3210,7 @@
           <a:p>
             <a:fld id="{E9CC885B-4903-4D54-9A93-00025F12DED9}" type="datetimeFigureOut">
               <a:rPr kumimoji="1" lang="ja-JP" altLang="en-US" smtClean="0"/>
-              <a:t>2025/10/21</a:t>
+              <a:t>2025/10/28</a:t>
             </a:fld>
             <a:endParaRPr kumimoji="1" lang="ja-JP" altLang="en-US"/>
           </a:p>
@@ -6106,8 +6107,8 @@
           </a:p>
         </p:txBody>
       </p:sp>
-      <mc:AlternateContent xmlns:mc="http://schemas.openxmlformats.org/markup-compatibility/2006">
-        <mc:Choice xmlns:a14="http://schemas.microsoft.com/office/drawing/2010/main" Requires="a14">
+      <mc:AlternateContent xmlns:mc="http://schemas.openxmlformats.org/markup-compatibility/2006" xmlns:a14="http://schemas.microsoft.com/office/drawing/2010/main">
+        <mc:Choice Requires="a14">
           <p:sp>
             <p:nvSpPr>
               <p:cNvPr id="6" name="テキスト ボックス 5">
@@ -6594,7 +6595,7 @@
             </p:txBody>
           </p:sp>
         </mc:Choice>
-        <mc:Fallback>
+        <mc:Fallback xmlns="">
           <p:sp>
             <p:nvSpPr>
               <p:cNvPr id="6" name="テキスト ボックス 5">
@@ -6643,6 +6644,132 @@
     <p:extLst>
       <p:ext uri="{BB962C8B-B14F-4D97-AF65-F5344CB8AC3E}">
         <p14:creationId xmlns:p14="http://schemas.microsoft.com/office/powerpoint/2010/main" val="1036640761"/>
+      </p:ext>
+    </p:extLst>
+  </p:cSld>
+  <p:clrMapOvr>
+    <a:masterClrMapping/>
+  </p:clrMapOvr>
+</p:sld>
+</file>
+
+<file path=ppt/slides/slide14.xml><?xml version="1.0" encoding="utf-8"?>
+<p:sld xmlns:a="http://schemas.openxmlformats.org/drawingml/2006/main" xmlns:r="http://schemas.openxmlformats.org/officeDocument/2006/relationships" xmlns:p="http://schemas.openxmlformats.org/presentationml/2006/main">
+  <p:cSld>
+    <p:spTree>
+      <p:nvGrpSpPr>
+        <p:cNvPr id="1" name=""/>
+        <p:cNvGrpSpPr/>
+        <p:nvPr/>
+      </p:nvGrpSpPr>
+      <p:grpSpPr>
+        <a:xfrm>
+          <a:off x="0" y="0"/>
+          <a:ext cx="0" cy="0"/>
+          <a:chOff x="0" y="0"/>
+          <a:chExt cx="0" cy="0"/>
+        </a:xfrm>
+      </p:grpSpPr>
+      <p:sp>
+        <p:nvSpPr>
+          <p:cNvPr id="4" name="テキスト ボックス 3">
+            <a:extLst>
+              <a:ext uri="{FF2B5EF4-FFF2-40B4-BE49-F238E27FC236}">
+                <a16:creationId xmlns:a16="http://schemas.microsoft.com/office/drawing/2014/main" id="{5A13BF46-B8C5-48AA-8308-C9ECFF431A18}"/>
+              </a:ext>
+            </a:extLst>
+          </p:cNvPr>
+          <p:cNvSpPr txBox="1"/>
+          <p:nvPr/>
+        </p:nvSpPr>
+        <p:spPr>
+          <a:xfrm>
+            <a:off x="567542" y="491954"/>
+            <a:ext cx="1943161" cy="584775"/>
+          </a:xfrm>
+          <a:prstGeom prst="rect">
+            <a:avLst/>
+          </a:prstGeom>
+          <a:noFill/>
+        </p:spPr>
+        <p:txBody>
+          <a:bodyPr wrap="none" rtlCol="0">
+            <a:spAutoFit/>
+          </a:bodyPr>
+          <a:lstStyle/>
+          <a:p>
+            <a:r>
+              <a:rPr kumimoji="1" lang="ja-JP" altLang="en-US" sz="3200" b="1" u="sng" dirty="0"/>
+              <a:t>反射 補足</a:t>
+            </a:r>
+            <a:endParaRPr kumimoji="1" lang="en-US" altLang="ja-JP" sz="3200" b="1" u="sng" dirty="0"/>
+          </a:p>
+        </p:txBody>
+      </p:sp>
+      <p:sp>
+        <p:nvSpPr>
+          <p:cNvPr id="6" name="テキスト ボックス 5">
+            <a:extLst>
+              <a:ext uri="{FF2B5EF4-FFF2-40B4-BE49-F238E27FC236}">
+                <a16:creationId xmlns:a16="http://schemas.microsoft.com/office/drawing/2014/main" id="{55830AD6-028B-4C4E-80BF-B70DFC1C3A46}"/>
+              </a:ext>
+            </a:extLst>
+          </p:cNvPr>
+          <p:cNvSpPr txBox="1"/>
+          <p:nvPr/>
+        </p:nvSpPr>
+        <p:spPr>
+          <a:xfrm>
+            <a:off x="567542" y="1216429"/>
+            <a:ext cx="9725739" cy="1938992"/>
+          </a:xfrm>
+          <a:prstGeom prst="rect">
+            <a:avLst/>
+          </a:prstGeom>
+          <a:noFill/>
+        </p:spPr>
+        <p:txBody>
+          <a:bodyPr wrap="none" rtlCol="0">
+            <a:spAutoFit/>
+          </a:bodyPr>
+          <a:lstStyle/>
+          <a:p>
+            <a:r>
+              <a:rPr lang="ja-JP" altLang="en-US" sz="2400" dirty="0"/>
+              <a:t>反射ベクトルは数値を計算させる問題はあまりありません。</a:t>
+            </a:r>
+            <a:endParaRPr lang="en-US" altLang="ja-JP" sz="2400" dirty="0"/>
+          </a:p>
+          <a:p>
+            <a:r>
+              <a:rPr lang="ja-JP" altLang="en-US" sz="2400" dirty="0"/>
+              <a:t>ただ、反射ベクトルを計算するプログラムを書いたり、</a:t>
+            </a:r>
+            <a:endParaRPr lang="en-US" altLang="ja-JP" sz="2400" dirty="0"/>
+          </a:p>
+          <a:p>
+            <a:r>
+              <a:rPr lang="ja-JP" altLang="en-US" sz="2400" dirty="0"/>
+              <a:t>計算式を作ったりする問題は出題されることがあります。</a:t>
+            </a:r>
+            <a:endParaRPr lang="en-US" altLang="ja-JP" sz="2400" dirty="0"/>
+          </a:p>
+          <a:p>
+            <a:endParaRPr lang="en-US" altLang="ja-JP" sz="2400" dirty="0"/>
+          </a:p>
+          <a:p>
+            <a:r>
+              <a:rPr lang="ja-JP" altLang="en-US" sz="2400" dirty="0"/>
+              <a:t>公式と、各ベクトルのイメージをしっかりと把握しておきましょう。</a:t>
+            </a:r>
+            <a:endParaRPr lang="en-US" altLang="ja-JP" sz="2400" dirty="0"/>
+          </a:p>
+        </p:txBody>
+      </p:sp>
+    </p:spTree>
+    <p:extLst>
+      <p:ext uri="{BB962C8B-B14F-4D97-AF65-F5344CB8AC3E}">
+        <p14:creationId xmlns:p14="http://schemas.microsoft.com/office/powerpoint/2010/main" val="2889508346"/>
       </p:ext>
     </p:extLst>
   </p:cSld>
@@ -9174,8 +9301,8 @@
           </a:p>
         </p:txBody>
       </p:sp>
-      <mc:AlternateContent xmlns:mc="http://schemas.openxmlformats.org/markup-compatibility/2006">
-        <mc:Choice xmlns:a14="http://schemas.microsoft.com/office/drawing/2010/main" Requires="a14">
+      <mc:AlternateContent xmlns:mc="http://schemas.openxmlformats.org/markup-compatibility/2006" xmlns:a14="http://schemas.microsoft.com/office/drawing/2010/main">
+        <mc:Choice Requires="a14">
           <p:sp>
             <p:nvSpPr>
               <p:cNvPr id="6" name="テキスト ボックス 5">
@@ -9365,43 +9492,7 @@
                         </a:solidFill>
                         <a:latin typeface="Cambria Math" panose="02040503050406030204" pitchFamily="18" charset="0"/>
                       </a:rPr>
-                      <m:t>[−</m:t>
-                    </m:r>
-                    <m:r>
-                      <a:rPr lang="en-US" altLang="ja-JP" sz="2400" b="0" i="1" smtClean="0">
-                        <a:solidFill>
-                          <a:srgbClr val="FF0000"/>
-                        </a:solidFill>
-                        <a:latin typeface="Cambria Math" panose="02040503050406030204" pitchFamily="18" charset="0"/>
-                      </a:rPr>
-                      <m:t>40</m:t>
-                    </m:r>
-                    <m:r>
-                      <a:rPr lang="en-US" altLang="ja-JP" sz="2400" b="0" i="1" smtClean="0">
-                        <a:solidFill>
-                          <a:srgbClr val="FF0000"/>
-                        </a:solidFill>
-                        <a:latin typeface="Cambria Math" panose="02040503050406030204" pitchFamily="18" charset="0"/>
-                      </a:rPr>
-                      <m:t>, </m:t>
-                    </m:r>
-                    <m:r>
-                      <a:rPr lang="en-US" altLang="ja-JP" sz="2400" b="0" i="1" smtClean="0">
-                        <a:solidFill>
-                          <a:srgbClr val="FF0000"/>
-                        </a:solidFill>
-                        <a:latin typeface="Cambria Math" panose="02040503050406030204" pitchFamily="18" charset="0"/>
-                      </a:rPr>
-                      <m:t>75</m:t>
-                    </m:r>
-                    <m:r>
-                      <a:rPr lang="en-US" altLang="ja-JP" sz="2400" b="0" i="1" smtClean="0">
-                        <a:solidFill>
-                          <a:srgbClr val="FF0000"/>
-                        </a:solidFill>
-                        <a:latin typeface="Cambria Math" panose="02040503050406030204" pitchFamily="18" charset="0"/>
-                      </a:rPr>
-                      <m:t>]</m:t>
+                      <m:t>[−40, 75]</m:t>
                     </m:r>
                   </m:oMath>
                 </a14:m>
@@ -9418,7 +9509,7 @@
             </p:txBody>
           </p:sp>
         </mc:Choice>
-        <mc:Fallback>
+        <mc:Fallback xmlns="">
           <p:sp>
             <p:nvSpPr>
               <p:cNvPr id="6" name="テキスト ボックス 5">
